--- a/Lesson06-FileManager/Lesson06-FileManager.pptx
+++ b/Lesson06-FileManager/Lesson06-FileManager.pptx
@@ -775,7 +775,7 @@
           <a:p>
             <a:r>
               <a:rPr lang="en-US" dirty="0"/>
-              <a:t>The project is called FileManager and uses the same two packages at version 1.78.0. The key comes from OPENAI_API_KEY and the model is gpt-4.1-mini, run at temperature zero with AutoInvokeKernelFunctions so the tool chain behaves as consistently as possible. Before the kernel is even built, Step 2 calls SetupDummyLogFile, which writes server_logs.txt into the current directory. It has six lines: four INFO entries and two ERRORs, a DatabaseConnectionException timing out against 192.168.1.50 and a NullReferenceException in PaymentProcessingModule.cs on line 42.</a:t>
+              <a:t>The project is called FileManager and uses the same two packages at version 1.78.0. Like Lesson 4, it has two source files: FileSystemPlugin.cs holds the plugin, and Program.cs wires the kernel and runs the task. The key comes from OPENAI_API_KEY and the model is gpt-4.1-mini, run at temperature zero with AutoInvokeKernelFunctions so the tool chain behaves as consistently as possible. Before the kernel is even built, Step 2 calls SetupDummyLogFile, which writes server_logs.txt into the current directory. It has six lines: four INFO entries and two ERRORs, a DatabaseConnectionException timing out against 192.168.1.50 and a NullReferenceException in PaymentProcessingModule.cs on line 42.</a:t>
             </a:r>
             <a:endParaRPr lang="en-US" dirty="0"/>
           </a:p>
@@ -9607,7 +9607,7 @@
                 <a:ea typeface="Courier New" pitchFamily="34" charset="-122"/>
                 <a:cs typeface="Courier New" pitchFamily="34" charset="-120"/>
               </a:rPr>
-              <a:t>FileManager/Program.cs</a:t>
+              <a:t>FileManager/FileSystemPlugin.cs</a:t>
             </a:r>
             <a:endParaRPr lang="en-US" sz="850" dirty="0"/>
           </a:p>
